--- a/assets/pptx/catalog-491.pptx
+++ b/assets/pptx/catalog-491.pptx
@@ -3249,7 +3249,7 @@
                 <a:ea typeface="Ebrima"/>
                 <a:cs typeface="Ebrima"/>
               </a:rPr>
-              <a:t>አመልክሃለው ወድጄ አመልክሃለው ፈቅጄ (4x)</a:t>
+              <a:t>አመልክሃለው ወድጄ አመልክሃለው ፈቅጄ 4x</a:t>
             </a:r>
           </a:p>
         </p:txBody>
@@ -3334,7 +3334,7 @@
                 <a:ea typeface="Ebrima"/>
                 <a:cs typeface="Ebrima"/>
               </a:rPr>
-              <a:t>በሽታን ከቤቴ ከደጄ አርቀሃል (2x)</a:t>
+              <a:t>በሽታን ከቤቴ ከደጄ አርቀሃል 2x</a:t>
             </a:r>
           </a:p>
         </p:txBody>
@@ -3419,7 +3419,7 @@
                 <a:ea typeface="Ebrima"/>
                 <a:cs typeface="Ebrima"/>
               </a:rPr>
-              <a:t>የዘመኔን ቁጥር ሞልተሃል አሃሃ (2x)</a:t>
+              <a:t>የዘመኔን ቁጥር ሞልተሃል አሃሃ 2x</a:t>
             </a:r>
           </a:p>
         </p:txBody>
@@ -3486,7 +3486,7 @@
                 <a:ea typeface="Ebrima"/>
                 <a:cs typeface="Ebrima"/>
               </a:rPr>
-              <a:t>አመልክሃለው ወድጄ አመልክሃለው ፈቅጄ (4x)</a:t>
+              <a:t>አመልክሃለው ወድጄ አመልክሃለው ፈቅጄ 4x</a:t>
             </a:r>
           </a:p>
         </p:txBody>
@@ -3571,7 +3571,7 @@
                 <a:ea typeface="Ebrima"/>
                 <a:cs typeface="Ebrima"/>
               </a:rPr>
-              <a:t>እዚያው ቀርቷል እንጂ ክብርህ ጋር ደርሶ (2x)</a:t>
+              <a:t>እዚያው ቀርቷል እንጂ ክብርህ ጋር ደርሶ 2x</a:t>
             </a:r>
           </a:p>
           <a:p>
@@ -3607,7 +3607,7 @@
                 <a:ea typeface="Ebrima"/>
                 <a:cs typeface="Ebrima"/>
               </a:rPr>
-              <a:t>እዚያው ቀርቷል እንጂ ክብርህ ጋር ደርሶ (4x)</a:t>
+              <a:t>እዚያው ቀርቷል እንጂ ክብርህ ጋር ደርሶ 4x</a:t>
             </a:r>
           </a:p>
         </p:txBody>
@@ -3728,7 +3728,7 @@
                 <a:ea typeface="Ebrima"/>
                 <a:cs typeface="Ebrima"/>
               </a:rPr>
-              <a:t>ከበረከት ማዶ (2x)</a:t>
+              <a:t>ከበረከት ማዶ 2x</a:t>
             </a:r>
           </a:p>
         </p:txBody>
@@ -3813,7 +3813,7 @@
                 <a:ea typeface="Ebrima"/>
                 <a:cs typeface="Ebrima"/>
               </a:rPr>
-              <a:t>በሽታን ከቤቴ ከደጄ አርቀሃል (2x)</a:t>
+              <a:t>በሽታን ከቤቴ ከደጄ አርቀሃል 2x</a:t>
             </a:r>
           </a:p>
         </p:txBody>
@@ -3898,7 +3898,7 @@
                 <a:ea typeface="Ebrima"/>
                 <a:cs typeface="Ebrima"/>
               </a:rPr>
-              <a:t>የዘመኔን ቁጥር ሞልተሃል አሃሃ (2x)</a:t>
+              <a:t>የዘመኔን ቁጥር ሞልተሃል አሃሃ 2x</a:t>
             </a:r>
           </a:p>
         </p:txBody>
@@ -3983,7 +3983,7 @@
                 <a:ea typeface="Ebrima"/>
                 <a:cs typeface="Ebrima"/>
               </a:rPr>
-              <a:t>እዚያው ቀርቷል እንጂ ክብርህ ጋር ደርሶ (2x)</a:t>
+              <a:t>እዚያው ቀርቷል እንጂ ክብርህ ጋር ደርሶ 2x</a:t>
             </a:r>
           </a:p>
           <a:p>
@@ -4019,7 +4019,7 @@
                 <a:ea typeface="Ebrima"/>
                 <a:cs typeface="Ebrima"/>
               </a:rPr>
-              <a:t>ተቀብሏል እንጂ ከሁሉ አብልጦ (4x)</a:t>
+              <a:t>ተቀብሏል እንጂ ከሁሉ አብልጦ 4x</a:t>
             </a:r>
           </a:p>
         </p:txBody>
